--- a/seminar/seminar-kokusupo.pptx
+++ b/seminar/seminar-kokusupo.pptx
@@ -30192,7 +30192,7 @@
                 <a:ea typeface="Yu Gothic" pitchFamily="34" charset="-122"/>
                 <a:cs typeface="Yu Gothic" pitchFamily="34" charset="-120"/>
               </a:rPr>
-              <a:t>mosh.jp/services/404875</a:t>
+              <a:t>forms.gle/UFiioc2R9Jgg8DSq8</a:t>
             </a:r>
             <a:endParaRPr lang="en-US" sz="1000" dirty="0"/>
           </a:p>
